--- a/reports/2026-10-27.pptx
+++ b/reports/2026-10-27.pptx
@@ -3382,11 +3382,11 @@
             <a:r>
               <a:rPr sz="2400" b="1">
                 <a:solidFill>
-                  <a:srgbClr val="BF4040"/>
-                </a:solidFill>
-                <a:latin typeface="Microsoft YaHei"/>
-              </a:rPr>
-              <a:t>-0.30%</a:t>
+                  <a:srgbClr val="198974"/>
+                </a:solidFill>
+                <a:latin typeface="Microsoft YaHei"/>
+              </a:rPr>
+              <a:t>0.18%</a:t>
             </a:r>
           </a:p>
         </p:txBody>
@@ -3533,7 +3533,7 @@
                 </a:solidFill>
                 <a:latin typeface="Microsoft YaHei"/>
               </a:rPr>
-              <a:t>-5.94%</a:t>
+              <a:t>-6.33%</a:t>
             </a:r>
           </a:p>
         </p:txBody>
@@ -4235,8 +4235,8 @@
         </p:nvSpPr>
         <p:spPr>
           <a:xfrm>
-            <a:off x="2390874" y="1792224"/>
-            <a:ext cx="32285" cy="146304"/>
+            <a:off x="1315268" y="1792224"/>
+            <a:ext cx="1107891" cy="146304"/>
           </a:xfrm>
           <a:prstGeom prst="rect">
             <a:avLst/>
@@ -4299,7 +4299,7 @@
                 </a:solidFill>
                 <a:latin typeface="Microsoft YaHei"/>
               </a:rPr>
-              <a:t>-0.04%</a:t>
+              <a:t>-1.18%</a:t>
             </a:r>
           </a:p>
         </p:txBody>
@@ -4390,7 +4390,7 @@
         <p:spPr>
           <a:xfrm>
             <a:off x="2423160" y="2176272"/>
-            <a:ext cx="228243" cy="146304"/>
+            <a:ext cx="357149" cy="146304"/>
           </a:xfrm>
           <a:prstGeom prst="rect">
             <a:avLst/>
@@ -4432,7 +4432,7 @@
         </p:nvSpPr>
         <p:spPr>
           <a:xfrm>
-            <a:off x="2697123" y="2130552"/>
+            <a:off x="2826029" y="2130552"/>
             <a:ext cx="502920" cy="201168"/>
           </a:xfrm>
           <a:prstGeom prst="rect">
@@ -4453,7 +4453,7 @@
                 </a:solidFill>
                 <a:latin typeface="Microsoft YaHei"/>
               </a:rPr>
-              <a:t>0.27%</a:t>
+              <a:t>0.38%</a:t>
             </a:r>
           </a:p>
         </p:txBody>
@@ -4543,8 +4543,316 @@
         </p:nvSpPr>
         <p:spPr>
           <a:xfrm>
-            <a:off x="2380151" y="2560320"/>
-            <a:ext cx="43008" cy="146304"/>
+            <a:off x="2423160" y="2560320"/>
+            <a:ext cx="932990" cy="146304"/>
+          </a:xfrm>
+          <a:prstGeom prst="rect">
+            <a:avLst/>
+          </a:prstGeom>
+          <a:solidFill>
+            <a:srgbClr val="198974"/>
+          </a:solidFill>
+          <a:ln>
+            <a:noFill/>
+          </a:ln>
+        </p:spPr>
+        <p:style>
+          <a:lnRef idx="1">
+            <a:schemeClr val="accent1"/>
+          </a:lnRef>
+          <a:fillRef idx="3">
+            <a:schemeClr val="accent1"/>
+          </a:fillRef>
+          <a:effectRef idx="2">
+            <a:schemeClr val="accent1"/>
+          </a:effectRef>
+          <a:fontRef idx="minor">
+            <a:schemeClr val="lt1"/>
+          </a:fontRef>
+        </p:style>
+        <p:txBody>
+          <a:bodyPr rtlCol="0" anchor="ctr"/>
+          <a:lstStyle/>
+          <a:p>
+            <a:pPr algn="ctr"/>
+          </a:p>
+        </p:txBody>
+      </p:sp>
+      <p:sp>
+        <p:nvSpPr>
+          <p:cNvPr id="17" name="TextBox 16"/>
+          <p:cNvSpPr txBox="1"/>
+          <p:nvPr/>
+        </p:nvSpPr>
+        <p:spPr>
+          <a:xfrm>
+            <a:off x="3401870" y="2514600"/>
+            <a:ext cx="502920" cy="201168"/>
+          </a:xfrm>
+          <a:prstGeom prst="rect">
+            <a:avLst/>
+          </a:prstGeom>
+          <a:noFill/>
+        </p:spPr>
+        <p:txBody>
+          <a:bodyPr wrap="none" lIns="18288" rIns="18288" tIns="18288" bIns="18288">
+            <a:spAutoFit/>
+          </a:bodyPr>
+          <a:lstStyle/>
+          <a:p>
+            <a:r>
+              <a:rPr sz="800" b="0">
+                <a:solidFill>
+                  <a:srgbClr val="1A2026"/>
+                </a:solidFill>
+                <a:latin typeface="Microsoft YaHei"/>
+              </a:rPr>
+              <a:t>0.99%</a:t>
+            </a:r>
+          </a:p>
+        </p:txBody>
+      </p:sp>
+      <p:sp>
+        <p:nvSpPr>
+          <p:cNvPr id="18" name="TextBox 17"/>
+          <p:cNvSpPr txBox="1"/>
+          <p:nvPr/>
+        </p:nvSpPr>
+        <p:spPr>
+          <a:xfrm>
+            <a:off x="640080" y="2889503"/>
+            <a:ext cx="1078992" cy="201168"/>
+          </a:xfrm>
+          <a:prstGeom prst="rect">
+            <a:avLst/>
+          </a:prstGeom>
+          <a:noFill/>
+        </p:spPr>
+        <p:txBody>
+          <a:bodyPr wrap="none" lIns="18288" rIns="18288" tIns="18288" bIns="18288">
+            <a:spAutoFit/>
+          </a:bodyPr>
+          <a:lstStyle/>
+          <a:p>
+            <a:r>
+              <a:rPr sz="800" b="0">
+                <a:solidFill>
+                  <a:srgbClr val="65707D"/>
+                </a:solidFill>
+                <a:latin typeface="Microsoft YaHei"/>
+              </a:rPr>
+              <a:t>兴全安泰积极养老</a:t>
+            </a:r>
+          </a:p>
+        </p:txBody>
+      </p:sp>
+      <p:sp>
+        <p:nvSpPr>
+          <p:cNvPr id="19" name="Rectangle 18"/>
+          <p:cNvSpPr/>
+          <p:nvPr/>
+        </p:nvSpPr>
+        <p:spPr>
+          <a:xfrm>
+            <a:off x="2423160" y="2962656"/>
+            <a:ext cx="9144" cy="118872"/>
+          </a:xfrm>
+          <a:prstGeom prst="rect">
+            <a:avLst/>
+          </a:prstGeom>
+          <a:solidFill>
+            <a:srgbClr val="DAD5C9"/>
+          </a:solidFill>
+          <a:ln>
+            <a:noFill/>
+          </a:ln>
+        </p:spPr>
+        <p:style>
+          <a:lnRef idx="1">
+            <a:schemeClr val="accent1"/>
+          </a:lnRef>
+          <a:fillRef idx="3">
+            <a:schemeClr val="accent1"/>
+          </a:fillRef>
+          <a:effectRef idx="2">
+            <a:schemeClr val="accent1"/>
+          </a:effectRef>
+          <a:fontRef idx="minor">
+            <a:schemeClr val="lt1"/>
+          </a:fontRef>
+        </p:style>
+        <p:txBody>
+          <a:bodyPr rtlCol="0" anchor="ctr"/>
+          <a:lstStyle/>
+          <a:p>
+            <a:pPr algn="ctr"/>
+          </a:p>
+        </p:txBody>
+      </p:sp>
+      <p:sp>
+        <p:nvSpPr>
+          <p:cNvPr id="20" name="Rectangle 19"/>
+          <p:cNvSpPr/>
+          <p:nvPr/>
+        </p:nvSpPr>
+        <p:spPr>
+          <a:xfrm>
+            <a:off x="2423160" y="2944368"/>
+            <a:ext cx="1325880" cy="146304"/>
+          </a:xfrm>
+          <a:prstGeom prst="rect">
+            <a:avLst/>
+          </a:prstGeom>
+          <a:solidFill>
+            <a:srgbClr val="198974"/>
+          </a:solidFill>
+          <a:ln>
+            <a:noFill/>
+          </a:ln>
+        </p:spPr>
+        <p:style>
+          <a:lnRef idx="1">
+            <a:schemeClr val="accent1"/>
+          </a:lnRef>
+          <a:fillRef idx="3">
+            <a:schemeClr val="accent1"/>
+          </a:fillRef>
+          <a:effectRef idx="2">
+            <a:schemeClr val="accent1"/>
+          </a:effectRef>
+          <a:fontRef idx="minor">
+            <a:schemeClr val="lt1"/>
+          </a:fontRef>
+        </p:style>
+        <p:txBody>
+          <a:bodyPr rtlCol="0" anchor="ctr"/>
+          <a:lstStyle/>
+          <a:p>
+            <a:pPr algn="ctr"/>
+          </a:p>
+        </p:txBody>
+      </p:sp>
+      <p:sp>
+        <p:nvSpPr>
+          <p:cNvPr id="21" name="TextBox 20"/>
+          <p:cNvSpPr txBox="1"/>
+          <p:nvPr/>
+        </p:nvSpPr>
+        <p:spPr>
+          <a:xfrm>
+            <a:off x="3794759" y="2898648"/>
+            <a:ext cx="502920" cy="201168"/>
+          </a:xfrm>
+          <a:prstGeom prst="rect">
+            <a:avLst/>
+          </a:prstGeom>
+          <a:noFill/>
+        </p:spPr>
+        <p:txBody>
+          <a:bodyPr wrap="none" lIns="18288" rIns="18288" tIns="18288" bIns="18288">
+            <a:spAutoFit/>
+          </a:bodyPr>
+          <a:lstStyle/>
+          <a:p>
+            <a:r>
+              <a:rPr sz="800" b="0">
+                <a:solidFill>
+                  <a:srgbClr val="1A2026"/>
+                </a:solidFill>
+                <a:latin typeface="Microsoft YaHei"/>
+              </a:rPr>
+              <a:t>1.41%</a:t>
+            </a:r>
+          </a:p>
+        </p:txBody>
+      </p:sp>
+      <p:sp>
+        <p:nvSpPr>
+          <p:cNvPr id="22" name="TextBox 21"/>
+          <p:cNvSpPr txBox="1"/>
+          <p:nvPr/>
+        </p:nvSpPr>
+        <p:spPr>
+          <a:xfrm>
+            <a:off x="640080" y="3273551"/>
+            <a:ext cx="1078992" cy="201168"/>
+          </a:xfrm>
+          <a:prstGeom prst="rect">
+            <a:avLst/>
+          </a:prstGeom>
+          <a:noFill/>
+        </p:spPr>
+        <p:txBody>
+          <a:bodyPr wrap="none" lIns="18288" rIns="18288" tIns="18288" bIns="18288">
+            <a:spAutoFit/>
+          </a:bodyPr>
+          <a:lstStyle/>
+          <a:p>
+            <a:r>
+              <a:rPr sz="800" b="0">
+                <a:solidFill>
+                  <a:srgbClr val="65707D"/>
+                </a:solidFill>
+                <a:latin typeface="Microsoft YaHei"/>
+              </a:rPr>
+              <a:t>易方达全球优质企</a:t>
+            </a:r>
+          </a:p>
+        </p:txBody>
+      </p:sp>
+      <p:sp>
+        <p:nvSpPr>
+          <p:cNvPr id="23" name="Rectangle 22"/>
+          <p:cNvSpPr/>
+          <p:nvPr/>
+        </p:nvSpPr>
+        <p:spPr>
+          <a:xfrm>
+            <a:off x="2423160" y="3346703"/>
+            <a:ext cx="9144" cy="118872"/>
+          </a:xfrm>
+          <a:prstGeom prst="rect">
+            <a:avLst/>
+          </a:prstGeom>
+          <a:solidFill>
+            <a:srgbClr val="DAD5C9"/>
+          </a:solidFill>
+          <a:ln>
+            <a:noFill/>
+          </a:ln>
+        </p:spPr>
+        <p:style>
+          <a:lnRef idx="1">
+            <a:schemeClr val="accent1"/>
+          </a:lnRef>
+          <a:fillRef idx="3">
+            <a:schemeClr val="accent1"/>
+          </a:fillRef>
+          <a:effectRef idx="2">
+            <a:schemeClr val="accent1"/>
+          </a:effectRef>
+          <a:fontRef idx="minor">
+            <a:schemeClr val="lt1"/>
+          </a:fontRef>
+        </p:style>
+        <p:txBody>
+          <a:bodyPr rtlCol="0" anchor="ctr"/>
+          <a:lstStyle/>
+          <a:p>
+            <a:pPr algn="ctr"/>
+          </a:p>
+        </p:txBody>
+      </p:sp>
+      <p:sp>
+        <p:nvSpPr>
+          <p:cNvPr id="24" name="Rectangle 23"/>
+          <p:cNvSpPr/>
+          <p:nvPr/>
+        </p:nvSpPr>
+        <p:spPr>
+          <a:xfrm>
+            <a:off x="1769523" y="3328415"/>
+            <a:ext cx="653636" cy="146304"/>
           </a:xfrm>
           <a:prstGeom prst="rect">
             <a:avLst/>
@@ -4580,13 +4888,13 @@
       </p:sp>
       <p:sp>
         <p:nvSpPr>
-          <p:cNvPr id="17" name="TextBox 16"/>
-          <p:cNvSpPr txBox="1"/>
-          <p:nvPr/>
-        </p:nvSpPr>
-        <p:spPr>
-          <a:xfrm>
-            <a:off x="2468879" y="2514600"/>
+          <p:cNvPr id="25" name="TextBox 24"/>
+          <p:cNvSpPr txBox="1"/>
+          <p:nvPr/>
+        </p:nvSpPr>
+        <p:spPr>
+          <a:xfrm>
+            <a:off x="2468879" y="3282696"/>
             <a:ext cx="502920" cy="201168"/>
           </a:xfrm>
           <a:prstGeom prst="rect">
@@ -4607,20 +4915,54 @@
                 </a:solidFill>
                 <a:latin typeface="Microsoft YaHei"/>
               </a:rPr>
-              <a:t>-0.05%</a:t>
-            </a:r>
-          </a:p>
-        </p:txBody>
-      </p:sp>
-      <p:sp>
-        <p:nvSpPr>
-          <p:cNvPr id="18" name="TextBox 17"/>
-          <p:cNvSpPr txBox="1"/>
-          <p:nvPr/>
-        </p:nvSpPr>
-        <p:spPr>
-          <a:xfrm>
-            <a:off x="640080" y="2889503"/>
+              <a:t>-0.70%</a:t>
+            </a:r>
+          </a:p>
+        </p:txBody>
+      </p:sp>
+      <p:sp>
+        <p:nvSpPr>
+          <p:cNvPr id="26" name="TextBox 25"/>
+          <p:cNvSpPr txBox="1"/>
+          <p:nvPr/>
+        </p:nvSpPr>
+        <p:spPr>
+          <a:xfrm>
+            <a:off x="4251960" y="1371600"/>
+            <a:ext cx="3383280" cy="219456"/>
+          </a:xfrm>
+          <a:prstGeom prst="rect">
+            <a:avLst/>
+          </a:prstGeom>
+          <a:noFill/>
+        </p:spPr>
+        <p:txBody>
+          <a:bodyPr wrap="none" lIns="18288" rIns="18288" tIns="18288" bIns="18288">
+            <a:spAutoFit/>
+          </a:bodyPr>
+          <a:lstStyle/>
+          <a:p>
+            <a:r>
+              <a:rPr sz="1100" b="1">
+                <a:solidFill>
+                  <a:srgbClr val="1A2026"/>
+                </a:solidFill>
+                <a:latin typeface="Microsoft YaHei"/>
+              </a:rPr>
+              <a:t>近1周收益</a:t>
+            </a:r>
+          </a:p>
+        </p:txBody>
+      </p:sp>
+      <p:sp>
+        <p:nvSpPr>
+          <p:cNvPr id="27" name="TextBox 26"/>
+          <p:cNvSpPr txBox="1"/>
+          <p:nvPr/>
+        </p:nvSpPr>
+        <p:spPr>
+          <a:xfrm>
+            <a:off x="4251960" y="1737360"/>
             <a:ext cx="1078992" cy="201168"/>
           </a:xfrm>
           <a:prstGeom prst="rect">
@@ -4641,20 +4983,20 @@
                 </a:solidFill>
                 <a:latin typeface="Microsoft YaHei"/>
               </a:rPr>
-              <a:t>兴全安泰积极养老</a:t>
-            </a:r>
-          </a:p>
-        </p:txBody>
-      </p:sp>
-      <p:sp>
-        <p:nvSpPr>
-          <p:cNvPr id="19" name="Rectangle 18"/>
+              <a:t>华夏沪深300E</a:t>
+            </a:r>
+          </a:p>
+        </p:txBody>
+      </p:sp>
+      <p:sp>
+        <p:nvSpPr>
+          <p:cNvPr id="28" name="Rectangle 27"/>
           <p:cNvSpPr/>
           <p:nvPr/>
         </p:nvSpPr>
         <p:spPr>
           <a:xfrm>
-            <a:off x="2423160" y="2962656"/>
+            <a:off x="6035040" y="1810512"/>
             <a:ext cx="9144" cy="118872"/>
           </a:xfrm>
           <a:prstGeom prst="rect">
@@ -4691,14 +5033,14 @@
       </p:sp>
       <p:sp>
         <p:nvSpPr>
-          <p:cNvPr id="20" name="Rectangle 19"/>
+          <p:cNvPr id="29" name="Rectangle 28"/>
           <p:cNvSpPr/>
           <p:nvPr/>
         </p:nvSpPr>
         <p:spPr>
           <a:xfrm>
-            <a:off x="1097280" y="2944368"/>
-            <a:ext cx="1325880" cy="146304"/>
+            <a:off x="4926748" y="1792224"/>
+            <a:ext cx="1108291" cy="146304"/>
           </a:xfrm>
           <a:prstGeom prst="rect">
             <a:avLst/>
@@ -4734,13 +5076,13 @@
       </p:sp>
       <p:sp>
         <p:nvSpPr>
-          <p:cNvPr id="21" name="TextBox 20"/>
-          <p:cNvSpPr txBox="1"/>
-          <p:nvPr/>
-        </p:nvSpPr>
-        <p:spPr>
-          <a:xfrm>
-            <a:off x="2468879" y="2898648"/>
+          <p:cNvPr id="30" name="TextBox 29"/>
+          <p:cNvSpPr txBox="1"/>
+          <p:nvPr/>
+        </p:nvSpPr>
+        <p:spPr>
+          <a:xfrm>
+            <a:off x="6080760" y="1746504"/>
             <a:ext cx="502920" cy="201168"/>
           </a:xfrm>
           <a:prstGeom prst="rect">
@@ -4761,20 +5103,20 @@
                 </a:solidFill>
                 <a:latin typeface="Microsoft YaHei"/>
               </a:rPr>
-              <a:t>-1.56%</a:t>
-            </a:r>
-          </a:p>
-        </p:txBody>
-      </p:sp>
-      <p:sp>
-        <p:nvSpPr>
-          <p:cNvPr id="22" name="TextBox 21"/>
-          <p:cNvSpPr txBox="1"/>
-          <p:nvPr/>
-        </p:nvSpPr>
-        <p:spPr>
-          <a:xfrm>
-            <a:off x="640080" y="3273551"/>
+              <a:t>-2.16%</a:t>
+            </a:r>
+          </a:p>
+        </p:txBody>
+      </p:sp>
+      <p:sp>
+        <p:nvSpPr>
+          <p:cNvPr id="31" name="TextBox 30"/>
+          <p:cNvSpPr txBox="1"/>
+          <p:nvPr/>
+        </p:nvSpPr>
+        <p:spPr>
+          <a:xfrm>
+            <a:off x="4251960" y="2121408"/>
             <a:ext cx="1078992" cy="201168"/>
           </a:xfrm>
           <a:prstGeom prst="rect">
@@ -4795,20 +5137,20 @@
                 </a:solidFill>
                 <a:latin typeface="Microsoft YaHei"/>
               </a:rPr>
-              <a:t>易方达全球优质企</a:t>
-            </a:r>
-          </a:p>
-        </p:txBody>
-      </p:sp>
-      <p:sp>
-        <p:nvSpPr>
-          <p:cNvPr id="23" name="Rectangle 22"/>
+              <a:t>富国红利精选QD</a:t>
+            </a:r>
+          </a:p>
+        </p:txBody>
+      </p:sp>
+      <p:sp>
+        <p:nvSpPr>
+          <p:cNvPr id="32" name="Rectangle 31"/>
           <p:cNvSpPr/>
           <p:nvPr/>
         </p:nvSpPr>
         <p:spPr>
           <a:xfrm>
-            <a:off x="2423160" y="3346703"/>
+            <a:off x="6035040" y="2194560"/>
             <a:ext cx="9144" cy="118872"/>
           </a:xfrm>
           <a:prstGeom prst="rect">
@@ -4845,14 +5187,14 @@
       </p:sp>
       <p:sp>
         <p:nvSpPr>
-          <p:cNvPr id="24" name="Rectangle 23"/>
+          <p:cNvPr id="33" name="Rectangle 32"/>
           <p:cNvSpPr/>
           <p:nvPr/>
         </p:nvSpPr>
         <p:spPr>
           <a:xfrm>
-            <a:off x="2328997" y="3328415"/>
-            <a:ext cx="94162" cy="146304"/>
+            <a:off x="4709160" y="2176272"/>
+            <a:ext cx="1325880" cy="146304"/>
           </a:xfrm>
           <a:prstGeom prst="rect">
             <a:avLst/>
@@ -4888,13 +5230,13 @@
       </p:sp>
       <p:sp>
         <p:nvSpPr>
-          <p:cNvPr id="25" name="TextBox 24"/>
-          <p:cNvSpPr txBox="1"/>
-          <p:nvPr/>
-        </p:nvSpPr>
-        <p:spPr>
-          <a:xfrm>
-            <a:off x="2468879" y="3282696"/>
+          <p:cNvPr id="34" name="TextBox 33"/>
+          <p:cNvSpPr txBox="1"/>
+          <p:nvPr/>
+        </p:nvSpPr>
+        <p:spPr>
+          <a:xfrm>
+            <a:off x="6080760" y="2130552"/>
             <a:ext cx="502920" cy="201168"/>
           </a:xfrm>
           <a:prstGeom prst="rect">
@@ -4915,54 +5257,20 @@
                 </a:solidFill>
                 <a:latin typeface="Microsoft YaHei"/>
               </a:rPr>
-              <a:t>-0.11%</a:t>
-            </a:r>
-          </a:p>
-        </p:txBody>
-      </p:sp>
-      <p:sp>
-        <p:nvSpPr>
-          <p:cNvPr id="26" name="TextBox 25"/>
-          <p:cNvSpPr txBox="1"/>
-          <p:nvPr/>
-        </p:nvSpPr>
-        <p:spPr>
-          <a:xfrm>
-            <a:off x="4251960" y="1371600"/>
-            <a:ext cx="3383280" cy="219456"/>
-          </a:xfrm>
-          <a:prstGeom prst="rect">
-            <a:avLst/>
-          </a:prstGeom>
-          <a:noFill/>
-        </p:spPr>
-        <p:txBody>
-          <a:bodyPr wrap="none" lIns="18288" rIns="18288" tIns="18288" bIns="18288">
-            <a:spAutoFit/>
-          </a:bodyPr>
-          <a:lstStyle/>
-          <a:p>
-            <a:r>
-              <a:rPr sz="1100" b="1">
-                <a:solidFill>
-                  <a:srgbClr val="1A2026"/>
-                </a:solidFill>
-                <a:latin typeface="Microsoft YaHei"/>
-              </a:rPr>
-              <a:t>近1周收益</a:t>
-            </a:r>
-          </a:p>
-        </p:txBody>
-      </p:sp>
-      <p:sp>
-        <p:nvSpPr>
-          <p:cNvPr id="27" name="TextBox 26"/>
-          <p:cNvSpPr txBox="1"/>
-          <p:nvPr/>
-        </p:nvSpPr>
-        <p:spPr>
-          <a:xfrm>
-            <a:off x="4251960" y="1737360"/>
+              <a:t>-2.58%</a:t>
+            </a:r>
+          </a:p>
+        </p:txBody>
+      </p:sp>
+      <p:sp>
+        <p:nvSpPr>
+          <p:cNvPr id="35" name="TextBox 34"/>
+          <p:cNvSpPr txBox="1"/>
+          <p:nvPr/>
+        </p:nvSpPr>
+        <p:spPr>
+          <a:xfrm>
+            <a:off x="4251960" y="2505456"/>
             <a:ext cx="1078992" cy="201168"/>
           </a:xfrm>
           <a:prstGeom prst="rect">
@@ -4983,20 +5291,20 @@
                 </a:solidFill>
                 <a:latin typeface="Microsoft YaHei"/>
               </a:rPr>
-              <a:t>华夏沪深300E</a:t>
-            </a:r>
-          </a:p>
-        </p:txBody>
-      </p:sp>
-      <p:sp>
-        <p:nvSpPr>
-          <p:cNvPr id="28" name="Rectangle 27"/>
+              <a:t>纳斯达克100指</a:t>
+            </a:r>
+          </a:p>
+        </p:txBody>
+      </p:sp>
+      <p:sp>
+        <p:nvSpPr>
+          <p:cNvPr id="36" name="Rectangle 35"/>
           <p:cNvSpPr/>
           <p:nvPr/>
         </p:nvSpPr>
         <p:spPr>
           <a:xfrm>
-            <a:off x="6035040" y="1810512"/>
+            <a:off x="6035040" y="2578608"/>
             <a:ext cx="9144" cy="118872"/>
           </a:xfrm>
           <a:prstGeom prst="rect">
@@ -5033,14 +5341,14 @@
       </p:sp>
       <p:sp>
         <p:nvSpPr>
-          <p:cNvPr id="29" name="Rectangle 28"/>
+          <p:cNvPr id="37" name="Rectangle 36"/>
           <p:cNvSpPr/>
           <p:nvPr/>
         </p:nvSpPr>
         <p:spPr>
           <a:xfrm>
-            <a:off x="5336332" y="1792224"/>
-            <a:ext cx="698707" cy="146304"/>
+            <a:off x="5516446" y="2560320"/>
+            <a:ext cx="518593" cy="146304"/>
           </a:xfrm>
           <a:prstGeom prst="rect">
             <a:avLst/>
@@ -5076,13 +5384,13 @@
       </p:sp>
       <p:sp>
         <p:nvSpPr>
-          <p:cNvPr id="30" name="TextBox 29"/>
-          <p:cNvSpPr txBox="1"/>
-          <p:nvPr/>
-        </p:nvSpPr>
-        <p:spPr>
-          <a:xfrm>
-            <a:off x="6080760" y="1746504"/>
+          <p:cNvPr id="38" name="TextBox 37"/>
+          <p:cNvSpPr txBox="1"/>
+          <p:nvPr/>
+        </p:nvSpPr>
+        <p:spPr>
+          <a:xfrm>
+            <a:off x="6080760" y="2514600"/>
             <a:ext cx="502920" cy="201168"/>
           </a:xfrm>
           <a:prstGeom prst="rect">
@@ -5103,20 +5411,20 @@
                 </a:solidFill>
                 <a:latin typeface="Microsoft YaHei"/>
               </a:rPr>
-              <a:t>-1.52%</a:t>
-            </a:r>
-          </a:p>
-        </p:txBody>
-      </p:sp>
-      <p:sp>
-        <p:nvSpPr>
-          <p:cNvPr id="31" name="TextBox 30"/>
-          <p:cNvSpPr txBox="1"/>
-          <p:nvPr/>
-        </p:nvSpPr>
-        <p:spPr>
-          <a:xfrm>
-            <a:off x="4251960" y="2121408"/>
+              <a:t>-1.01%</a:t>
+            </a:r>
+          </a:p>
+        </p:txBody>
+      </p:sp>
+      <p:sp>
+        <p:nvSpPr>
+          <p:cNvPr id="39" name="TextBox 38"/>
+          <p:cNvSpPr txBox="1"/>
+          <p:nvPr/>
+        </p:nvSpPr>
+        <p:spPr>
+          <a:xfrm>
+            <a:off x="4251960" y="2889503"/>
             <a:ext cx="1078992" cy="201168"/>
           </a:xfrm>
           <a:prstGeom prst="rect">
@@ -5137,20 +5445,20 @@
                 </a:solidFill>
                 <a:latin typeface="Microsoft YaHei"/>
               </a:rPr>
-              <a:t>富国红利精选QD</a:t>
-            </a:r>
-          </a:p>
-        </p:txBody>
-      </p:sp>
-      <p:sp>
-        <p:nvSpPr>
-          <p:cNvPr id="32" name="Rectangle 31"/>
+              <a:t>兴全安泰积极养老</a:t>
+            </a:r>
+          </a:p>
+        </p:txBody>
+      </p:sp>
+      <p:sp>
+        <p:nvSpPr>
+          <p:cNvPr id="40" name="Rectangle 39"/>
           <p:cNvSpPr/>
           <p:nvPr/>
         </p:nvSpPr>
         <p:spPr>
           <a:xfrm>
-            <a:off x="6035040" y="2194560"/>
+            <a:off x="6035040" y="2962656"/>
             <a:ext cx="9144" cy="118872"/>
           </a:xfrm>
           <a:prstGeom prst="rect">
@@ -5187,14 +5495,14 @@
       </p:sp>
       <p:sp>
         <p:nvSpPr>
-          <p:cNvPr id="33" name="Rectangle 32"/>
+          <p:cNvPr id="41" name="Rectangle 40"/>
           <p:cNvSpPr/>
           <p:nvPr/>
         </p:nvSpPr>
         <p:spPr>
           <a:xfrm>
-            <a:off x="4709160" y="2176272"/>
-            <a:ext cx="1325880" cy="146304"/>
+            <a:off x="5738804" y="2944368"/>
+            <a:ext cx="296235" cy="146304"/>
           </a:xfrm>
           <a:prstGeom prst="rect">
             <a:avLst/>
@@ -5230,13 +5538,13 @@
       </p:sp>
       <p:sp>
         <p:nvSpPr>
-          <p:cNvPr id="34" name="TextBox 33"/>
-          <p:cNvSpPr txBox="1"/>
-          <p:nvPr/>
-        </p:nvSpPr>
-        <p:spPr>
-          <a:xfrm>
-            <a:off x="6080760" y="2130552"/>
+          <p:cNvPr id="42" name="TextBox 41"/>
+          <p:cNvSpPr txBox="1"/>
+          <p:nvPr/>
+        </p:nvSpPr>
+        <p:spPr>
+          <a:xfrm>
+            <a:off x="6080760" y="2898648"/>
             <a:ext cx="502920" cy="201168"/>
           </a:xfrm>
           <a:prstGeom prst="rect">
@@ -5257,20 +5565,20 @@
                 </a:solidFill>
                 <a:latin typeface="Microsoft YaHei"/>
               </a:rPr>
-              <a:t>-2.89%</a:t>
-            </a:r>
-          </a:p>
-        </p:txBody>
-      </p:sp>
-      <p:sp>
-        <p:nvSpPr>
-          <p:cNvPr id="35" name="TextBox 34"/>
-          <p:cNvSpPr txBox="1"/>
-          <p:nvPr/>
-        </p:nvSpPr>
-        <p:spPr>
-          <a:xfrm>
-            <a:off x="4251960" y="2505456"/>
+              <a:t>-0.58%</a:t>
+            </a:r>
+          </a:p>
+        </p:txBody>
+      </p:sp>
+      <p:sp>
+        <p:nvSpPr>
+          <p:cNvPr id="43" name="TextBox 42"/>
+          <p:cNvSpPr txBox="1"/>
+          <p:nvPr/>
+        </p:nvSpPr>
+        <p:spPr>
+          <a:xfrm>
+            <a:off x="4251960" y="3273551"/>
             <a:ext cx="1078992" cy="201168"/>
           </a:xfrm>
           <a:prstGeom prst="rect">
@@ -5291,20 +5599,20 @@
                 </a:solidFill>
                 <a:latin typeface="Microsoft YaHei"/>
               </a:rPr>
-              <a:t>纳斯达克100指</a:t>
-            </a:r>
-          </a:p>
-        </p:txBody>
-      </p:sp>
-      <p:sp>
-        <p:nvSpPr>
-          <p:cNvPr id="36" name="Rectangle 35"/>
+              <a:t>易方达全球优质企</a:t>
+            </a:r>
+          </a:p>
+        </p:txBody>
+      </p:sp>
+      <p:sp>
+        <p:nvSpPr>
+          <p:cNvPr id="44" name="Rectangle 43"/>
           <p:cNvSpPr/>
           <p:nvPr/>
         </p:nvSpPr>
         <p:spPr>
           <a:xfrm>
-            <a:off x="6035040" y="2578608"/>
+            <a:off x="6035040" y="3346703"/>
             <a:ext cx="9144" cy="118872"/>
           </a:xfrm>
           <a:prstGeom prst="rect">
@@ -5341,14 +5649,14 @@
       </p:sp>
       <p:sp>
         <p:nvSpPr>
-          <p:cNvPr id="37" name="Rectangle 36"/>
+          <p:cNvPr id="45" name="Rectangle 44"/>
           <p:cNvSpPr/>
           <p:nvPr/>
         </p:nvSpPr>
         <p:spPr>
           <a:xfrm>
-            <a:off x="5590283" y="2560320"/>
-            <a:ext cx="444756" cy="146304"/>
+            <a:off x="4943029" y="3328415"/>
+            <a:ext cx="1092010" cy="146304"/>
           </a:xfrm>
           <a:prstGeom prst="rect">
             <a:avLst/>
@@ -5384,13 +5692,13 @@
       </p:sp>
       <p:sp>
         <p:nvSpPr>
-          <p:cNvPr id="38" name="TextBox 37"/>
-          <p:cNvSpPr txBox="1"/>
-          <p:nvPr/>
-        </p:nvSpPr>
-        <p:spPr>
-          <a:xfrm>
-            <a:off x="6080760" y="2514600"/>
+          <p:cNvPr id="46" name="TextBox 45"/>
+          <p:cNvSpPr txBox="1"/>
+          <p:nvPr/>
+        </p:nvSpPr>
+        <p:spPr>
+          <a:xfrm>
+            <a:off x="6080760" y="3282696"/>
             <a:ext cx="502920" cy="201168"/>
           </a:xfrm>
           <a:prstGeom prst="rect">
@@ -5411,20 +5719,54 @@
                 </a:solidFill>
                 <a:latin typeface="Microsoft YaHei"/>
               </a:rPr>
-              <a:t>-0.97%</a:t>
-            </a:r>
-          </a:p>
-        </p:txBody>
-      </p:sp>
-      <p:sp>
-        <p:nvSpPr>
-          <p:cNvPr id="39" name="TextBox 38"/>
-          <p:cNvSpPr txBox="1"/>
-          <p:nvPr/>
-        </p:nvSpPr>
-        <p:spPr>
-          <a:xfrm>
-            <a:off x="4251960" y="2889503"/>
+              <a:t>-2.13%</a:t>
+            </a:r>
+          </a:p>
+        </p:txBody>
+      </p:sp>
+      <p:sp>
+        <p:nvSpPr>
+          <p:cNvPr id="47" name="TextBox 46"/>
+          <p:cNvSpPr txBox="1"/>
+          <p:nvPr/>
+        </p:nvSpPr>
+        <p:spPr>
+          <a:xfrm>
+            <a:off x="7863840" y="1371600"/>
+            <a:ext cx="3383280" cy="219456"/>
+          </a:xfrm>
+          <a:prstGeom prst="rect">
+            <a:avLst/>
+          </a:prstGeom>
+          <a:noFill/>
+        </p:spPr>
+        <p:txBody>
+          <a:bodyPr wrap="none" lIns="18288" rIns="18288" tIns="18288" bIns="18288">
+            <a:spAutoFit/>
+          </a:bodyPr>
+          <a:lstStyle/>
+          <a:p>
+            <a:r>
+              <a:rPr sz="1100" b="1">
+                <a:solidFill>
+                  <a:srgbClr val="1A2026"/>
+                </a:solidFill>
+                <a:latin typeface="Microsoft YaHei"/>
+              </a:rPr>
+              <a:t>近1个月收益</a:t>
+            </a:r>
+          </a:p>
+        </p:txBody>
+      </p:sp>
+      <p:sp>
+        <p:nvSpPr>
+          <p:cNvPr id="48" name="TextBox 47"/>
+          <p:cNvSpPr txBox="1"/>
+          <p:nvPr/>
+        </p:nvSpPr>
+        <p:spPr>
+          <a:xfrm>
+            <a:off x="7863840" y="1737360"/>
             <a:ext cx="1078992" cy="201168"/>
           </a:xfrm>
           <a:prstGeom prst="rect">
@@ -5445,20 +5787,20 @@
                 </a:solidFill>
                 <a:latin typeface="Microsoft YaHei"/>
               </a:rPr>
-              <a:t>兴全安泰积极养老</a:t>
-            </a:r>
-          </a:p>
-        </p:txBody>
-      </p:sp>
-      <p:sp>
-        <p:nvSpPr>
-          <p:cNvPr id="40" name="Rectangle 39"/>
+              <a:t>华夏沪深300E</a:t>
+            </a:r>
+          </a:p>
+        </p:txBody>
+      </p:sp>
+      <p:sp>
+        <p:nvSpPr>
+          <p:cNvPr id="49" name="Rectangle 48"/>
           <p:cNvSpPr/>
           <p:nvPr/>
         </p:nvSpPr>
         <p:spPr>
           <a:xfrm>
-            <a:off x="6035040" y="2962656"/>
+            <a:off x="9646919" y="1810512"/>
             <a:ext cx="9144" cy="118872"/>
           </a:xfrm>
           <a:prstGeom prst="rect">
@@ -5495,14 +5837,14 @@
       </p:sp>
       <p:sp>
         <p:nvSpPr>
-          <p:cNvPr id="41" name="Rectangle 40"/>
+          <p:cNvPr id="50" name="Rectangle 49"/>
           <p:cNvSpPr/>
           <p:nvPr/>
         </p:nvSpPr>
         <p:spPr>
           <a:xfrm>
-            <a:off x="5193346" y="2944368"/>
-            <a:ext cx="841693" cy="146304"/>
+            <a:off x="8387394" y="1792224"/>
+            <a:ext cx="1259525" cy="146304"/>
           </a:xfrm>
           <a:prstGeom prst="rect">
             <a:avLst/>
@@ -5538,13 +5880,13 @@
       </p:sp>
       <p:sp>
         <p:nvSpPr>
-          <p:cNvPr id="42" name="TextBox 41"/>
-          <p:cNvSpPr txBox="1"/>
-          <p:nvPr/>
-        </p:nvSpPr>
-        <p:spPr>
-          <a:xfrm>
-            <a:off x="6080760" y="2898648"/>
+          <p:cNvPr id="51" name="TextBox 50"/>
+          <p:cNvSpPr txBox="1"/>
+          <p:nvPr/>
+        </p:nvSpPr>
+        <p:spPr>
+          <a:xfrm>
+            <a:off x="9692640" y="1746504"/>
             <a:ext cx="502920" cy="201168"/>
           </a:xfrm>
           <a:prstGeom prst="rect">
@@ -5565,20 +5907,20 @@
                 </a:solidFill>
                 <a:latin typeface="Microsoft YaHei"/>
               </a:rPr>
-              <a:t>-1.84%</a:t>
-            </a:r>
-          </a:p>
-        </p:txBody>
-      </p:sp>
-      <p:sp>
-        <p:nvSpPr>
-          <p:cNvPr id="43" name="TextBox 42"/>
-          <p:cNvSpPr txBox="1"/>
-          <p:nvPr/>
-        </p:nvSpPr>
-        <p:spPr>
-          <a:xfrm>
-            <a:off x="4251960" y="3273551"/>
+              <a:t>-9.41%</a:t>
+            </a:r>
+          </a:p>
+        </p:txBody>
+      </p:sp>
+      <p:sp>
+        <p:nvSpPr>
+          <p:cNvPr id="52" name="TextBox 51"/>
+          <p:cNvSpPr txBox="1"/>
+          <p:nvPr/>
+        </p:nvSpPr>
+        <p:spPr>
+          <a:xfrm>
+            <a:off x="7863840" y="2121408"/>
             <a:ext cx="1078992" cy="201168"/>
           </a:xfrm>
           <a:prstGeom prst="rect">
@@ -5599,20 +5941,20 @@
                 </a:solidFill>
                 <a:latin typeface="Microsoft YaHei"/>
               </a:rPr>
-              <a:t>易方达全球优质企</a:t>
-            </a:r>
-          </a:p>
-        </p:txBody>
-      </p:sp>
-      <p:sp>
-        <p:nvSpPr>
-          <p:cNvPr id="44" name="Rectangle 43"/>
+              <a:t>富国红利精选QD</a:t>
+            </a:r>
+          </a:p>
+        </p:txBody>
+      </p:sp>
+      <p:sp>
+        <p:nvSpPr>
+          <p:cNvPr id="53" name="Rectangle 52"/>
           <p:cNvSpPr/>
           <p:nvPr/>
         </p:nvSpPr>
         <p:spPr>
           <a:xfrm>
-            <a:off x="6035040" y="3346703"/>
+            <a:off x="9646919" y="2194560"/>
             <a:ext cx="9144" cy="118872"/>
           </a:xfrm>
           <a:prstGeom prst="rect">
@@ -5649,14 +5991,14 @@
       </p:sp>
       <p:sp>
         <p:nvSpPr>
-          <p:cNvPr id="45" name="Rectangle 44"/>
+          <p:cNvPr id="54" name="Rectangle 53"/>
           <p:cNvSpPr/>
           <p:nvPr/>
         </p:nvSpPr>
         <p:spPr>
           <a:xfrm>
-            <a:off x="5370306" y="3328415"/>
-            <a:ext cx="664733" cy="146304"/>
+            <a:off x="8902589" y="2176272"/>
+            <a:ext cx="744330" cy="146304"/>
           </a:xfrm>
           <a:prstGeom prst="rect">
             <a:avLst/>
@@ -5692,13 +6034,13 @@
       </p:sp>
       <p:sp>
         <p:nvSpPr>
-          <p:cNvPr id="46" name="TextBox 45"/>
-          <p:cNvSpPr txBox="1"/>
-          <p:nvPr/>
-        </p:nvSpPr>
-        <p:spPr>
-          <a:xfrm>
-            <a:off x="6080760" y="3282696"/>
+          <p:cNvPr id="55" name="TextBox 54"/>
+          <p:cNvSpPr txBox="1"/>
+          <p:nvPr/>
+        </p:nvSpPr>
+        <p:spPr>
+          <a:xfrm>
+            <a:off x="9692640" y="2130552"/>
             <a:ext cx="502920" cy="201168"/>
           </a:xfrm>
           <a:prstGeom prst="rect">
@@ -5719,54 +6061,20 @@
                 </a:solidFill>
                 <a:latin typeface="Microsoft YaHei"/>
               </a:rPr>
-              <a:t>-1.45%</a:t>
-            </a:r>
-          </a:p>
-        </p:txBody>
-      </p:sp>
-      <p:sp>
-        <p:nvSpPr>
-          <p:cNvPr id="47" name="TextBox 46"/>
-          <p:cNvSpPr txBox="1"/>
-          <p:nvPr/>
-        </p:nvSpPr>
-        <p:spPr>
-          <a:xfrm>
-            <a:off x="7863840" y="1371600"/>
-            <a:ext cx="3383280" cy="219456"/>
-          </a:xfrm>
-          <a:prstGeom prst="rect">
-            <a:avLst/>
-          </a:prstGeom>
-          <a:noFill/>
-        </p:spPr>
-        <p:txBody>
-          <a:bodyPr wrap="none" lIns="18288" rIns="18288" tIns="18288" bIns="18288">
-            <a:spAutoFit/>
-          </a:bodyPr>
-          <a:lstStyle/>
-          <a:p>
-            <a:r>
-              <a:rPr sz="1100" b="1">
-                <a:solidFill>
-                  <a:srgbClr val="1A2026"/>
-                </a:solidFill>
-                <a:latin typeface="Microsoft YaHei"/>
-              </a:rPr>
-              <a:t>近1个月收益</a:t>
-            </a:r>
-          </a:p>
-        </p:txBody>
-      </p:sp>
-      <p:sp>
-        <p:nvSpPr>
-          <p:cNvPr id="48" name="TextBox 47"/>
-          <p:cNvSpPr txBox="1"/>
-          <p:nvPr/>
-        </p:nvSpPr>
-        <p:spPr>
-          <a:xfrm>
-            <a:off x="7863840" y="1737360"/>
+              <a:t>-5.56%</a:t>
+            </a:r>
+          </a:p>
+        </p:txBody>
+      </p:sp>
+      <p:sp>
+        <p:nvSpPr>
+          <p:cNvPr id="56" name="TextBox 55"/>
+          <p:cNvSpPr txBox="1"/>
+          <p:nvPr/>
+        </p:nvSpPr>
+        <p:spPr>
+          <a:xfrm>
+            <a:off x="7863840" y="2505456"/>
             <a:ext cx="1078992" cy="201168"/>
           </a:xfrm>
           <a:prstGeom prst="rect">
@@ -5787,20 +6095,20 @@
                 </a:solidFill>
                 <a:latin typeface="Microsoft YaHei"/>
               </a:rPr>
-              <a:t>华夏沪深300E</a:t>
-            </a:r>
-          </a:p>
-        </p:txBody>
-      </p:sp>
-      <p:sp>
-        <p:nvSpPr>
-          <p:cNvPr id="49" name="Rectangle 48"/>
+              <a:t>纳斯达克100指</a:t>
+            </a:r>
+          </a:p>
+        </p:txBody>
+      </p:sp>
+      <p:sp>
+        <p:nvSpPr>
+          <p:cNvPr id="57" name="Rectangle 56"/>
           <p:cNvSpPr/>
           <p:nvPr/>
         </p:nvSpPr>
         <p:spPr>
           <a:xfrm>
-            <a:off x="9646919" y="1810512"/>
+            <a:off x="9646919" y="2578608"/>
             <a:ext cx="9144" cy="118872"/>
           </a:xfrm>
           <a:prstGeom prst="rect">
@@ -5837,14 +6145,14 @@
       </p:sp>
       <p:sp>
         <p:nvSpPr>
-          <p:cNvPr id="50" name="Rectangle 49"/>
+          <p:cNvPr id="58" name="Rectangle 57"/>
           <p:cNvSpPr/>
           <p:nvPr/>
         </p:nvSpPr>
         <p:spPr>
           <a:xfrm>
-            <a:off x="8563023" y="1792224"/>
-            <a:ext cx="1083896" cy="146304"/>
+            <a:off x="9510466" y="2560320"/>
+            <a:ext cx="136453" cy="146304"/>
           </a:xfrm>
           <a:prstGeom prst="rect">
             <a:avLst/>
@@ -5880,13 +6188,13 @@
       </p:sp>
       <p:sp>
         <p:nvSpPr>
-          <p:cNvPr id="51" name="TextBox 50"/>
-          <p:cNvSpPr txBox="1"/>
-          <p:nvPr/>
-        </p:nvSpPr>
-        <p:spPr>
-          <a:xfrm>
-            <a:off x="9692640" y="1746504"/>
+          <p:cNvPr id="59" name="TextBox 58"/>
+          <p:cNvSpPr txBox="1"/>
+          <p:nvPr/>
+        </p:nvSpPr>
+        <p:spPr>
+          <a:xfrm>
+            <a:off x="9692640" y="2514600"/>
             <a:ext cx="502920" cy="201168"/>
           </a:xfrm>
           <a:prstGeom prst="rect">
@@ -5907,20 +6215,20 @@
                 </a:solidFill>
                 <a:latin typeface="Microsoft YaHei"/>
               </a:rPr>
-              <a:t>-7.38%</a:t>
-            </a:r>
-          </a:p>
-        </p:txBody>
-      </p:sp>
-      <p:sp>
-        <p:nvSpPr>
-          <p:cNvPr id="52" name="TextBox 51"/>
-          <p:cNvSpPr txBox="1"/>
-          <p:nvPr/>
-        </p:nvSpPr>
-        <p:spPr>
-          <a:xfrm>
-            <a:off x="7863840" y="2121408"/>
+              <a:t>-1.02%</a:t>
+            </a:r>
+          </a:p>
+        </p:txBody>
+      </p:sp>
+      <p:sp>
+        <p:nvSpPr>
+          <p:cNvPr id="60" name="TextBox 59"/>
+          <p:cNvSpPr txBox="1"/>
+          <p:nvPr/>
+        </p:nvSpPr>
+        <p:spPr>
+          <a:xfrm>
+            <a:off x="7863840" y="2889503"/>
             <a:ext cx="1078992" cy="201168"/>
           </a:xfrm>
           <a:prstGeom prst="rect">
@@ -5941,20 +6249,20 @@
                 </a:solidFill>
                 <a:latin typeface="Microsoft YaHei"/>
               </a:rPr>
-              <a:t>富国红利精选QD</a:t>
-            </a:r>
-          </a:p>
-        </p:txBody>
-      </p:sp>
-      <p:sp>
-        <p:nvSpPr>
-          <p:cNvPr id="53" name="Rectangle 52"/>
+              <a:t>兴全安泰积极养老</a:t>
+            </a:r>
+          </a:p>
+        </p:txBody>
+      </p:sp>
+      <p:sp>
+        <p:nvSpPr>
+          <p:cNvPr id="61" name="Rectangle 60"/>
           <p:cNvSpPr/>
           <p:nvPr/>
         </p:nvSpPr>
         <p:spPr>
           <a:xfrm>
-            <a:off x="9646919" y="2194560"/>
+            <a:off x="9646919" y="2962656"/>
             <a:ext cx="9144" cy="118872"/>
           </a:xfrm>
           <a:prstGeom prst="rect">
@@ -5991,14 +6299,14 @@
       </p:sp>
       <p:sp>
         <p:nvSpPr>
-          <p:cNvPr id="54" name="Rectangle 53"/>
+          <p:cNvPr id="62" name="Rectangle 61"/>
           <p:cNvSpPr/>
           <p:nvPr/>
         </p:nvSpPr>
         <p:spPr>
           <a:xfrm>
-            <a:off x="8723511" y="2176272"/>
-            <a:ext cx="923408" cy="146304"/>
+            <a:off x="8876909" y="2944368"/>
+            <a:ext cx="770010" cy="146304"/>
           </a:xfrm>
           <a:prstGeom prst="rect">
             <a:avLst/>
@@ -6034,13 +6342,13 @@
       </p:sp>
       <p:sp>
         <p:nvSpPr>
-          <p:cNvPr id="55" name="TextBox 54"/>
-          <p:cNvSpPr txBox="1"/>
-          <p:nvPr/>
-        </p:nvSpPr>
-        <p:spPr>
-          <a:xfrm>
-            <a:off x="9692640" y="2130552"/>
+          <p:cNvPr id="63" name="TextBox 62"/>
+          <p:cNvSpPr txBox="1"/>
+          <p:nvPr/>
+        </p:nvSpPr>
+        <p:spPr>
+          <a:xfrm>
+            <a:off x="9692640" y="2898648"/>
             <a:ext cx="502920" cy="201168"/>
           </a:xfrm>
           <a:prstGeom prst="rect">
@@ -6061,20 +6369,20 @@
                 </a:solidFill>
                 <a:latin typeface="Microsoft YaHei"/>
               </a:rPr>
-              <a:t>-6.29%</a:t>
-            </a:r>
-          </a:p>
-        </p:txBody>
-      </p:sp>
-      <p:sp>
-        <p:nvSpPr>
-          <p:cNvPr id="56" name="TextBox 55"/>
-          <p:cNvSpPr txBox="1"/>
-          <p:nvPr/>
-        </p:nvSpPr>
-        <p:spPr>
-          <a:xfrm>
-            <a:off x="7863840" y="2505456"/>
+              <a:t>-5.75%</a:t>
+            </a:r>
+          </a:p>
+        </p:txBody>
+      </p:sp>
+      <p:sp>
+        <p:nvSpPr>
+          <p:cNvPr id="64" name="TextBox 63"/>
+          <p:cNvSpPr txBox="1"/>
+          <p:nvPr/>
+        </p:nvSpPr>
+        <p:spPr>
+          <a:xfrm>
+            <a:off x="7863840" y="3273551"/>
             <a:ext cx="1078992" cy="201168"/>
           </a:xfrm>
           <a:prstGeom prst="rect">
@@ -6095,20 +6403,20 @@
                 </a:solidFill>
                 <a:latin typeface="Microsoft YaHei"/>
               </a:rPr>
-              <a:t>纳斯达克100指</a:t>
-            </a:r>
-          </a:p>
-        </p:txBody>
-      </p:sp>
-      <p:sp>
-        <p:nvSpPr>
-          <p:cNvPr id="57" name="Rectangle 56"/>
+              <a:t>易方达全球优质企</a:t>
+            </a:r>
+          </a:p>
+        </p:txBody>
+      </p:sp>
+      <p:sp>
+        <p:nvSpPr>
+          <p:cNvPr id="65" name="Rectangle 64"/>
           <p:cNvSpPr/>
           <p:nvPr/>
         </p:nvSpPr>
         <p:spPr>
           <a:xfrm>
-            <a:off x="9646919" y="2578608"/>
+            <a:off x="9646919" y="3346703"/>
             <a:ext cx="9144" cy="118872"/>
           </a:xfrm>
           <a:prstGeom prst="rect">
@@ -6145,14 +6453,14 @@
       </p:sp>
       <p:sp>
         <p:nvSpPr>
-          <p:cNvPr id="58" name="Rectangle 57"/>
+          <p:cNvPr id="66" name="Rectangle 65"/>
           <p:cNvSpPr/>
           <p:nvPr/>
         </p:nvSpPr>
         <p:spPr>
           <a:xfrm>
-            <a:off x="9591532" y="2560320"/>
-            <a:ext cx="55387" cy="146304"/>
+            <a:off x="8321040" y="3328415"/>
+            <a:ext cx="1325880" cy="146304"/>
           </a:xfrm>
           <a:prstGeom prst="rect">
             <a:avLst/>
@@ -6188,314 +6496,6 @@
       </p:sp>
       <p:sp>
         <p:nvSpPr>
-          <p:cNvPr id="59" name="TextBox 58"/>
-          <p:cNvSpPr txBox="1"/>
-          <p:nvPr/>
-        </p:nvSpPr>
-        <p:spPr>
-          <a:xfrm>
-            <a:off x="9692640" y="2514600"/>
-            <a:ext cx="502920" cy="201168"/>
-          </a:xfrm>
-          <a:prstGeom prst="rect">
-            <a:avLst/>
-          </a:prstGeom>
-          <a:noFill/>
-        </p:spPr>
-        <p:txBody>
-          <a:bodyPr wrap="none" lIns="18288" rIns="18288" tIns="18288" bIns="18288">
-            <a:spAutoFit/>
-          </a:bodyPr>
-          <a:lstStyle/>
-          <a:p>
-            <a:r>
-              <a:rPr sz="800" b="0">
-                <a:solidFill>
-                  <a:srgbClr val="1A2026"/>
-                </a:solidFill>
-                <a:latin typeface="Microsoft YaHei"/>
-              </a:rPr>
-              <a:t>-0.38%</a:t>
-            </a:r>
-          </a:p>
-        </p:txBody>
-      </p:sp>
-      <p:sp>
-        <p:nvSpPr>
-          <p:cNvPr id="60" name="TextBox 59"/>
-          <p:cNvSpPr txBox="1"/>
-          <p:nvPr/>
-        </p:nvSpPr>
-        <p:spPr>
-          <a:xfrm>
-            <a:off x="7863840" y="2889503"/>
-            <a:ext cx="1078992" cy="201168"/>
-          </a:xfrm>
-          <a:prstGeom prst="rect">
-            <a:avLst/>
-          </a:prstGeom>
-          <a:noFill/>
-        </p:spPr>
-        <p:txBody>
-          <a:bodyPr wrap="none" lIns="18288" rIns="18288" tIns="18288" bIns="18288">
-            <a:spAutoFit/>
-          </a:bodyPr>
-          <a:lstStyle/>
-          <a:p>
-            <a:r>
-              <a:rPr sz="800" b="0">
-                <a:solidFill>
-                  <a:srgbClr val="65707D"/>
-                </a:solidFill>
-                <a:latin typeface="Microsoft YaHei"/>
-              </a:rPr>
-              <a:t>兴全安泰积极养老</a:t>
-            </a:r>
-          </a:p>
-        </p:txBody>
-      </p:sp>
-      <p:sp>
-        <p:nvSpPr>
-          <p:cNvPr id="61" name="Rectangle 60"/>
-          <p:cNvSpPr/>
-          <p:nvPr/>
-        </p:nvSpPr>
-        <p:spPr>
-          <a:xfrm>
-            <a:off x="9646919" y="2962656"/>
-            <a:ext cx="9144" cy="118872"/>
-          </a:xfrm>
-          <a:prstGeom prst="rect">
-            <a:avLst/>
-          </a:prstGeom>
-          <a:solidFill>
-            <a:srgbClr val="DAD5C9"/>
-          </a:solidFill>
-          <a:ln>
-            <a:noFill/>
-          </a:ln>
-        </p:spPr>
-        <p:style>
-          <a:lnRef idx="1">
-            <a:schemeClr val="accent1"/>
-          </a:lnRef>
-          <a:fillRef idx="3">
-            <a:schemeClr val="accent1"/>
-          </a:fillRef>
-          <a:effectRef idx="2">
-            <a:schemeClr val="accent1"/>
-          </a:effectRef>
-          <a:fontRef idx="minor">
-            <a:schemeClr val="lt1"/>
-          </a:fontRef>
-        </p:style>
-        <p:txBody>
-          <a:bodyPr rtlCol="0" anchor="ctr"/>
-          <a:lstStyle/>
-          <a:p>
-            <a:pPr algn="ctr"/>
-          </a:p>
-        </p:txBody>
-      </p:sp>
-      <p:sp>
-        <p:nvSpPr>
-          <p:cNvPr id="62" name="Rectangle 61"/>
-          <p:cNvSpPr/>
-          <p:nvPr/>
-        </p:nvSpPr>
-        <p:spPr>
-          <a:xfrm>
-            <a:off x="8672137" y="2944368"/>
-            <a:ext cx="974782" cy="146304"/>
-          </a:xfrm>
-          <a:prstGeom prst="rect">
-            <a:avLst/>
-          </a:prstGeom>
-          <a:solidFill>
-            <a:srgbClr val="BF4040"/>
-          </a:solidFill>
-          <a:ln>
-            <a:noFill/>
-          </a:ln>
-        </p:spPr>
-        <p:style>
-          <a:lnRef idx="1">
-            <a:schemeClr val="accent1"/>
-          </a:lnRef>
-          <a:fillRef idx="3">
-            <a:schemeClr val="accent1"/>
-          </a:fillRef>
-          <a:effectRef idx="2">
-            <a:schemeClr val="accent1"/>
-          </a:effectRef>
-          <a:fontRef idx="minor">
-            <a:schemeClr val="lt1"/>
-          </a:fontRef>
-        </p:style>
-        <p:txBody>
-          <a:bodyPr rtlCol="0" anchor="ctr"/>
-          <a:lstStyle/>
-          <a:p>
-            <a:pPr algn="ctr"/>
-          </a:p>
-        </p:txBody>
-      </p:sp>
-      <p:sp>
-        <p:nvSpPr>
-          <p:cNvPr id="63" name="TextBox 62"/>
-          <p:cNvSpPr txBox="1"/>
-          <p:nvPr/>
-        </p:nvSpPr>
-        <p:spPr>
-          <a:xfrm>
-            <a:off x="9692640" y="2898648"/>
-            <a:ext cx="502920" cy="201168"/>
-          </a:xfrm>
-          <a:prstGeom prst="rect">
-            <a:avLst/>
-          </a:prstGeom>
-          <a:noFill/>
-        </p:spPr>
-        <p:txBody>
-          <a:bodyPr wrap="none" lIns="18288" rIns="18288" tIns="18288" bIns="18288">
-            <a:spAutoFit/>
-          </a:bodyPr>
-          <a:lstStyle/>
-          <a:p>
-            <a:r>
-              <a:rPr sz="800" b="0">
-                <a:solidFill>
-                  <a:srgbClr val="1A2026"/>
-                </a:solidFill>
-                <a:latin typeface="Microsoft YaHei"/>
-              </a:rPr>
-              <a:t>-6.64%</a:t>
-            </a:r>
-          </a:p>
-        </p:txBody>
-      </p:sp>
-      <p:sp>
-        <p:nvSpPr>
-          <p:cNvPr id="64" name="TextBox 63"/>
-          <p:cNvSpPr txBox="1"/>
-          <p:nvPr/>
-        </p:nvSpPr>
-        <p:spPr>
-          <a:xfrm>
-            <a:off x="7863840" y="3273551"/>
-            <a:ext cx="1078992" cy="201168"/>
-          </a:xfrm>
-          <a:prstGeom prst="rect">
-            <a:avLst/>
-          </a:prstGeom>
-          <a:noFill/>
-        </p:spPr>
-        <p:txBody>
-          <a:bodyPr wrap="none" lIns="18288" rIns="18288" tIns="18288" bIns="18288">
-            <a:spAutoFit/>
-          </a:bodyPr>
-          <a:lstStyle/>
-          <a:p>
-            <a:r>
-              <a:rPr sz="800" b="0">
-                <a:solidFill>
-                  <a:srgbClr val="65707D"/>
-                </a:solidFill>
-                <a:latin typeface="Microsoft YaHei"/>
-              </a:rPr>
-              <a:t>易方达全球优质企</a:t>
-            </a:r>
-          </a:p>
-        </p:txBody>
-      </p:sp>
-      <p:sp>
-        <p:nvSpPr>
-          <p:cNvPr id="65" name="Rectangle 64"/>
-          <p:cNvSpPr/>
-          <p:nvPr/>
-        </p:nvSpPr>
-        <p:spPr>
-          <a:xfrm>
-            <a:off x="9646919" y="3346703"/>
-            <a:ext cx="9144" cy="118872"/>
-          </a:xfrm>
-          <a:prstGeom prst="rect">
-            <a:avLst/>
-          </a:prstGeom>
-          <a:solidFill>
-            <a:srgbClr val="DAD5C9"/>
-          </a:solidFill>
-          <a:ln>
-            <a:noFill/>
-          </a:ln>
-        </p:spPr>
-        <p:style>
-          <a:lnRef idx="1">
-            <a:schemeClr val="accent1"/>
-          </a:lnRef>
-          <a:fillRef idx="3">
-            <a:schemeClr val="accent1"/>
-          </a:fillRef>
-          <a:effectRef idx="2">
-            <a:schemeClr val="accent1"/>
-          </a:effectRef>
-          <a:fontRef idx="minor">
-            <a:schemeClr val="lt1"/>
-          </a:fontRef>
-        </p:style>
-        <p:txBody>
-          <a:bodyPr rtlCol="0" anchor="ctr"/>
-          <a:lstStyle/>
-          <a:p>
-            <a:pPr algn="ctr"/>
-          </a:p>
-        </p:txBody>
-      </p:sp>
-      <p:sp>
-        <p:nvSpPr>
-          <p:cNvPr id="66" name="Rectangle 65"/>
-          <p:cNvSpPr/>
-          <p:nvPr/>
-        </p:nvSpPr>
-        <p:spPr>
-          <a:xfrm>
-            <a:off x="8321040" y="3328415"/>
-            <a:ext cx="1325880" cy="146304"/>
-          </a:xfrm>
-          <a:prstGeom prst="rect">
-            <a:avLst/>
-          </a:prstGeom>
-          <a:solidFill>
-            <a:srgbClr val="BF4040"/>
-          </a:solidFill>
-          <a:ln>
-            <a:noFill/>
-          </a:ln>
-        </p:spPr>
-        <p:style>
-          <a:lnRef idx="1">
-            <a:schemeClr val="accent1"/>
-          </a:lnRef>
-          <a:fillRef idx="3">
-            <a:schemeClr val="accent1"/>
-          </a:fillRef>
-          <a:effectRef idx="2">
-            <a:schemeClr val="accent1"/>
-          </a:effectRef>
-          <a:fontRef idx="minor">
-            <a:schemeClr val="lt1"/>
-          </a:fontRef>
-        </p:style>
-        <p:txBody>
-          <a:bodyPr rtlCol="0" anchor="ctr"/>
-          <a:lstStyle/>
-          <a:p>
-            <a:pPr algn="ctr"/>
-          </a:p>
-        </p:txBody>
-      </p:sp>
-      <p:sp>
-        <p:nvSpPr>
           <p:cNvPr id="67" name="TextBox 66"/>
           <p:cNvSpPr txBox="1"/>
           <p:nvPr/>
@@ -6523,7 +6523,7 @@
                 </a:solidFill>
                 <a:latin typeface="Microsoft YaHei"/>
               </a:rPr>
-              <a:t>-9.03%</a:t>
+              <a:t>-9.91%</a:t>
             </a:r>
           </a:p>
         </p:txBody>
@@ -6761,7 +6761,7 @@
                 </a:solidFill>
                 <a:latin typeface="Microsoft YaHei"/>
               </a:rPr>
-              <a:t>1.5831</a:t>
+              <a:t>1.5644</a:t>
             </a:r>
           </a:p>
         </p:txBody>
@@ -6795,7 +6795,7 @@
                 </a:solidFill>
                 <a:latin typeface="Microsoft YaHei"/>
               </a:rPr>
-              <a:t>2026-10-26</a:t>
+              <a:t>2026-10-27</a:t>
             </a:r>
           </a:p>
         </p:txBody>
@@ -6897,7 +6897,7 @@
                 </a:solidFill>
                 <a:latin typeface="Microsoft YaHei"/>
               </a:rPr>
-              <a:t>1.7595</a:t>
+              <a:t>1.7662</a:t>
             </a:r>
           </a:p>
         </p:txBody>
@@ -6931,7 +6931,7 @@
                 </a:solidFill>
                 <a:latin typeface="Microsoft YaHei"/>
               </a:rPr>
-              <a:t>2026-10-23</a:t>
+              <a:t>2026-10-26</a:t>
             </a:r>
           </a:p>
         </p:txBody>
@@ -7033,7 +7033,7 @@
                 </a:solidFill>
                 <a:latin typeface="Microsoft YaHei"/>
               </a:rPr>
-              <a:t>1.9804</a:t>
+              <a:t>2.0001</a:t>
             </a:r>
           </a:p>
         </p:txBody>
@@ -7067,7 +7067,7 @@
                 </a:solidFill>
                 <a:latin typeface="Microsoft YaHei"/>
               </a:rPr>
-              <a:t>2026-10-23</a:t>
+              <a:t>2026-10-26</a:t>
             </a:r>
           </a:p>
         </p:txBody>
@@ -7169,7 +7169,7 @@
                 </a:solidFill>
                 <a:latin typeface="Microsoft YaHei"/>
               </a:rPr>
-              <a:t>1.1389</a:t>
+              <a:t>1.1550</a:t>
             </a:r>
           </a:p>
         </p:txBody>
@@ -7203,7 +7203,7 @@
                 </a:solidFill>
                 <a:latin typeface="Microsoft YaHei"/>
               </a:rPr>
-              <a:t>2026-10-22</a:t>
+              <a:t>2026-10-23</a:t>
             </a:r>
           </a:p>
         </p:txBody>
@@ -7305,7 +7305,7 @@
                 </a:solidFill>
                 <a:latin typeface="Microsoft YaHei"/>
               </a:rPr>
-              <a:t>1.8080</a:t>
+              <a:t>1.7954</a:t>
             </a:r>
           </a:p>
         </p:txBody>
@@ -7339,7 +7339,7 @@
                 </a:solidFill>
                 <a:latin typeface="Microsoft YaHei"/>
               </a:rPr>
-              <a:t>2026-10-23</a:t>
+              <a:t>2026-10-26</a:t>
             </a:r>
           </a:p>
         </p:txBody>
@@ -7626,7 +7626,7 @@
         <p:spPr>
           <a:xfrm>
             <a:off x="2788920" y="1737360"/>
-            <a:ext cx="1364667" cy="201168"/>
+            <a:ext cx="1344516" cy="201168"/>
           </a:xfrm>
           <a:prstGeom prst="rect">
             <a:avLst/>
@@ -7737,7 +7737,7 @@
         <p:spPr>
           <a:xfrm>
             <a:off x="8549640" y="1737360"/>
-            <a:ext cx="1380537" cy="201168"/>
+            <a:ext cx="1355876" cy="201168"/>
           </a:xfrm>
           <a:prstGeom prst="rect">
             <a:avLst/>
@@ -7800,7 +7800,7 @@
                 </a:solidFill>
                 <a:latin typeface="Microsoft YaHei"/>
               </a:rPr>
-              <a:t>19.81%</a:t>
+              <a:t>19.45%</a:t>
             </a:r>
           </a:p>
         </p:txBody>
@@ -7848,7 +7848,7 @@
         <p:spPr>
           <a:xfrm>
             <a:off x="2788920" y="2331720"/>
-            <a:ext cx="830404" cy="201168"/>
+            <a:ext cx="818142" cy="201168"/>
           </a:xfrm>
           <a:prstGeom prst="rect">
             <a:avLst/>
@@ -7959,7 +7959,7 @@
         <p:spPr>
           <a:xfrm>
             <a:off x="8549640" y="2331720"/>
-            <a:ext cx="858070" cy="201168"/>
+            <a:ext cx="850453" cy="201168"/>
           </a:xfrm>
           <a:prstGeom prst="rect">
             <a:avLst/>
@@ -8022,7 +8022,7 @@
                 </a:solidFill>
                 <a:latin typeface="Microsoft YaHei"/>
               </a:rPr>
-              <a:t>12.31%</a:t>
+              <a:t>12.20%</a:t>
             </a:r>
           </a:p>
         </p:txBody>
@@ -8070,7 +8070,7 @@
         <p:spPr>
           <a:xfrm>
             <a:off x="2788920" y="2926080"/>
-            <a:ext cx="773257" cy="201168"/>
+            <a:ext cx="761839" cy="201168"/>
           </a:xfrm>
           <a:prstGeom prst="rect">
             <a:avLst/>
@@ -8181,7 +8181,7 @@
         <p:spPr>
           <a:xfrm>
             <a:off x="8549640" y="2926080"/>
-            <a:ext cx="1389447" cy="201168"/>
+            <a:ext cx="1393812" cy="201168"/>
           </a:xfrm>
           <a:prstGeom prst="rect">
             <a:avLst/>
@@ -8244,7 +8244,7 @@
                 </a:solidFill>
                 <a:latin typeface="Microsoft YaHei"/>
               </a:rPr>
-              <a:t>19.94%</a:t>
+              <a:t>20.00%</a:t>
             </a:r>
           </a:p>
         </p:txBody>
@@ -8292,7 +8292,7 @@
         <p:spPr>
           <a:xfrm>
             <a:off x="2788920" y="3520440"/>
-            <a:ext cx="935284" cy="201168"/>
+            <a:ext cx="921474" cy="201168"/>
           </a:xfrm>
           <a:prstGeom prst="rect">
             <a:avLst/>
@@ -8403,7 +8403,7 @@
         <p:spPr>
           <a:xfrm>
             <a:off x="8549640" y="3520440"/>
-            <a:ext cx="1045322" cy="201168"/>
+            <a:ext cx="1059892" cy="201168"/>
           </a:xfrm>
           <a:prstGeom prst="rect">
             <a:avLst/>
@@ -8466,7 +8466,7 @@
                 </a:solidFill>
                 <a:latin typeface="Microsoft YaHei"/>
               </a:rPr>
-              <a:t>15.00%</a:t>
+              <a:t>15.21%</a:t>
             </a:r>
           </a:p>
         </p:txBody>
@@ -8577,7 +8577,7 @@
                 </a:solidFill>
                 <a:latin typeface="Microsoft YaHei"/>
               </a:rPr>
-              <a:t>-31.74%</a:t>
+              <a:t>-32.22%</a:t>
             </a:r>
           </a:p>
         </p:txBody>
@@ -8688,7 +8688,7 @@
                 </a:solidFill>
                 <a:latin typeface="Microsoft YaHei"/>
               </a:rPr>
-              <a:t>34.12%</a:t>
+              <a:t>34.11%</a:t>
             </a:r>
           </a:p>
         </p:txBody>
@@ -9108,7 +9108,7 @@
                 </a:solidFill>
                 <a:latin typeface="Microsoft YaHei"/>
               </a:rPr>
-              <a:t>2026-10-26</a:t>
+              <a:t>2026-10-27</a:t>
             </a:r>
           </a:p>
         </p:txBody>
@@ -9244,7 +9244,7 @@
                 </a:solidFill>
                 <a:latin typeface="Microsoft YaHei"/>
               </a:rPr>
-              <a:t>2026-10-23</a:t>
+              <a:t>2026-10-26</a:t>
             </a:r>
           </a:p>
         </p:txBody>
@@ -9380,7 +9380,7 @@
                 </a:solidFill>
                 <a:latin typeface="Microsoft YaHei"/>
               </a:rPr>
-              <a:t>2026-10-23</a:t>
+              <a:t>2026-10-26</a:t>
             </a:r>
           </a:p>
         </p:txBody>
@@ -9516,7 +9516,7 @@
                 </a:solidFill>
                 <a:latin typeface="Microsoft YaHei"/>
               </a:rPr>
-              <a:t>2026-10-22</a:t>
+              <a:t>2026-10-23</a:t>
             </a:r>
           </a:p>
         </p:txBody>
@@ -9652,7 +9652,7 @@
                 </a:solidFill>
                 <a:latin typeface="Microsoft YaHei"/>
               </a:rPr>
-              <a:t>2026-10-23</a:t>
+              <a:t>2026-10-26</a:t>
             </a:r>
           </a:p>
         </p:txBody>
